--- a/courses/learn_placement/module02-01-force-directed-place/slides.pptx
+++ b/courses/learn_placement/module02-01-force-directed-place/slides.pptx
@@ -16,6 +16,9 @@
     <p:sldId id="264" r:id="rId16"/>
     <p:sldId id="265" r:id="rId17"/>
     <p:sldId id="266" r:id="rId18"/>
+    <p:sldId id="267" r:id="rId19"/>
+    <p:sldId id="268" r:id="rId20"/>
+    <p:sldId id="269" r:id="rId21"/>
   </p:sldIdLst>
   <p:sldSz cx="12191695" cy="6858000" type="screen4x3"/>
   <p:notesSz cx="6858000" cy="9144000"/>
@@ -582,7 +585,7 @@
           <a:lstStyle/>
           <a:p>
             <a:r>
-              <a:t>Common traps: celebrating HPWL while cells pile into one bin; ignoring fixed pads A and D; mixing bbox and clique models in one report; keeping only the final SA iterate instead of the best; and forgetting that timing weights change the objective, not just the label.</a:t>
+              <a:t>In the browser lab track, open the **force-directed-place** lab from the tools shelf. Load the starter placement, run the algorithm once, and read HPWL—and density when the panel shows it. Work the challenges that lock the goldens, then come back to implement the same loop yourself.</a:t>
             </a:r>
           </a:p>
         </p:txBody>
@@ -652,6 +655,146 @@
           <a:lstStyle/>
           <a:p>
             <a:r>
+              <a:t>In the implement track, open this module's EXAMPLES.md Pseudocode section and the course common solvers. Parse `tiny_place.json`, run the algorithm with a deterministic seed, and print coordinates plus HPWL. Match the browser goldens before you claim the checklist.</a:t>
+            </a:r>
+          </a:p>
+        </p:txBody>
+      </p:sp>
+      <p:sp>
+        <p:nvSpPr>
+          <p:cNvPr id="4" name="Slide Number Placeholder 3"/>
+          <p:cNvSpPr>
+            <a:spLocks noGrp="1"/>
+          </p:cNvSpPr>
+          <p:nvPr>
+            <p:ph type="sldNum" idx="5" sz="quarter"/>
+          </p:nvPr>
+        </p:nvSpPr>
+        <p:spPr/>
+      </p:sp>
+    </p:spTree>
+  </p:cSld>
+  <p:clrMapOvr>
+    <a:masterClrMapping/>
+  </p:clrMapOvr>
+</p:notes>
+</file>
+
+<file path=ppt/notesSlides/notesSlide12.xml><?xml version="1.0" encoding="utf-8"?>
+<p:notes xmlns:a="http://schemas.openxmlformats.org/drawingml/2006/main" xmlns:p="http://schemas.openxmlformats.org/presentationml/2006/main" xmlns:r="http://schemas.openxmlformats.org/officeDocument/2006/relationships">
+  <p:cSld>
+    <p:spTree>
+      <p:nvGrpSpPr>
+        <p:cNvPr id="1" name=""/>
+        <p:cNvGrpSpPr/>
+        <p:nvPr/>
+      </p:nvGrpSpPr>
+      <p:grpSpPr>
+        <a:xfrm>
+          <a:off x="0" y="0"/>
+          <a:ext cx="0" cy="0"/>
+          <a:chOff x="0" y="0"/>
+          <a:chExt cx="0" cy="0"/>
+        </a:xfrm>
+      </p:grpSpPr>
+      <p:sp>
+        <p:nvSpPr>
+          <p:cNvPr id="2" name="Slide Image Placeholder 1"/>
+          <p:cNvSpPr>
+            <a:spLocks noGrp="1"/>
+          </p:cNvSpPr>
+          <p:nvPr>
+            <p:ph type="sldImg" idx="2"/>
+          </p:nvPr>
+        </p:nvSpPr>
+        <p:spPr/>
+      </p:sp>
+      <p:sp>
+        <p:nvSpPr>
+          <p:cNvPr id="3" name="Notes Placeholder 2"/>
+          <p:cNvSpPr>
+            <a:spLocks noGrp="1"/>
+          </p:cNvSpPr>
+          <p:nvPr>
+            <p:ph type="body" idx="3" sz="quarter"/>
+          </p:nvPr>
+        </p:nvSpPr>
+        <p:spPr/>
+        <p:txBody>
+          <a:bodyPr/>
+          <a:lstStyle/>
+          <a:p>
+            <a:r>
+              <a:t>Common traps: celebrating HPWL while cells pile into one bin; ignoring fixed pads A and D; mixing bbox and clique models in one report; keeping only the final SA iterate instead of the best; and forgetting that timing weights change the objective, not just the label.</a:t>
+            </a:r>
+          </a:p>
+        </p:txBody>
+      </p:sp>
+      <p:sp>
+        <p:nvSpPr>
+          <p:cNvPr id="4" name="Slide Number Placeholder 3"/>
+          <p:cNvSpPr>
+            <a:spLocks noGrp="1"/>
+          </p:cNvSpPr>
+          <p:nvPr>
+            <p:ph type="sldNum" idx="5" sz="quarter"/>
+          </p:nvPr>
+        </p:nvSpPr>
+        <p:spPr/>
+      </p:sp>
+    </p:spTree>
+  </p:cSld>
+  <p:clrMapOvr>
+    <a:masterClrMapping/>
+  </p:clrMapOvr>
+</p:notes>
+</file>
+
+<file path=ppt/notesSlides/notesSlide13.xml><?xml version="1.0" encoding="utf-8"?>
+<p:notes xmlns:a="http://schemas.openxmlformats.org/drawingml/2006/main" xmlns:p="http://schemas.openxmlformats.org/presentationml/2006/main" xmlns:r="http://schemas.openxmlformats.org/officeDocument/2006/relationships">
+  <p:cSld>
+    <p:spTree>
+      <p:nvGrpSpPr>
+        <p:cNvPr id="1" name=""/>
+        <p:cNvGrpSpPr/>
+        <p:nvPr/>
+      </p:nvGrpSpPr>
+      <p:grpSpPr>
+        <a:xfrm>
+          <a:off x="0" y="0"/>
+          <a:ext cx="0" cy="0"/>
+          <a:chOff x="0" y="0"/>
+          <a:chExt cx="0" cy="0"/>
+        </a:xfrm>
+      </p:grpSpPr>
+      <p:sp>
+        <p:nvSpPr>
+          <p:cNvPr id="2" name="Slide Image Placeholder 1"/>
+          <p:cNvSpPr>
+            <a:spLocks noGrp="1"/>
+          </p:cNvSpPr>
+          <p:nvPr>
+            <p:ph type="sldImg" idx="2"/>
+          </p:nvPr>
+        </p:nvSpPr>
+        <p:spPr/>
+      </p:sp>
+      <p:sp>
+        <p:nvSpPr>
+          <p:cNvPr id="3" name="Notes Placeholder 2"/>
+          <p:cNvSpPr>
+            <a:spLocks noGrp="1"/>
+          </p:cNvSpPr>
+          <p:nvPr>
+            <p:ph type="body" idx="3" sz="quarter"/>
+          </p:nvPr>
+        </p:nvSpPr>
+        <p:spPr/>
+        <p:txBody>
+          <a:bodyPr/>
+          <a:lstStyle/>
+          <a:p>
+            <a:r>
               <a:t>Complete the checklist for at least one track—preferably both. Implement until your metrics match the starter goldens. When you’re ready, take the short quiz, then continue to the next module.</a:t>
             </a:r>
           </a:p>
@@ -725,12 +868,6 @@
               <a:t>Each iteration: for free cells, blend current position toward the neighbor average with a small alpha. Fixed pads stay put. Too much alpha collapses the design; too little barely moves. Report HPWL before and after with the same net model.</a:t>
             </a:r>
           </a:p>
-          <a:p/>
-          <a:p>
-            <a:r>
-              <a:t>&lt;!-- algorithm-walkthrough --&gt;</a:t>
-            </a:r>
-          </a:p>
         </p:txBody>
       </p:sp>
       <p:sp>
@@ -798,7 +935,13 @@
           <a:lstStyle/>
           <a:p>
             <a:r>
-              <a:t>Force-directed place pulls free cells toward the average of their net neighbors, plus a weak center pull. Begin on the spread starter at HPWL fifty-two.</a:t>
+              <a:t>Force-directed place blends each free cell toward its neighbor average with step alpha. Fixed pads do not move.</a:t>
+            </a:r>
+          </a:p>
+          <a:p/>
+          <a:p>
+            <a:r>
+              <a:t>Open this module's examples file and find the Pseudocode section. That written sketch is what you implement on the implement track and what the browser challenges measure.</a:t>
             </a:r>
           </a:p>
         </p:txBody>
@@ -868,7 +1011,7 @@
           <a:lstStyle/>
           <a:p>
             <a:r>
-              <a:t>After a couple of lite iterations, A–D drift toward the center while E and F follow their neighbors. Wirelength is already dropping.</a:t>
+              <a:t>From starter fifty-two, default lite iterations land near eighteen point seven—better wirelength, still above compact fourteen.</a:t>
             </a:r>
           </a:p>
         </p:txBody>
@@ -938,7 +1081,7 @@
           <a:lstStyle/>
           <a:p>
             <a:r>
-              <a:t>Default five iterations land near eighteen point seven—clearly better than fifty-two, still above the compact golden fourteen.</a:t>
+              <a:t>Force-directed place pulls free cells toward the average of their net neighbors, plus a weak center pull. Begin on the spread starter at HPWL fifty-two.</a:t>
             </a:r>
           </a:p>
         </p:txBody>
@@ -1008,7 +1151,7 @@
           <a:lstStyle/>
           <a:p>
             <a:r>
-              <a:t>Golden fourteen is tighter still. Force is a cheap continuous move—good teaching progress without claiming the absolute minimum.</a:t>
+              <a:t>After a couple of lite iterations, A–D drift toward the center while E and F follow their neighbors. Wirelength is already dropping.</a:t>
             </a:r>
           </a:p>
         </p:txBody>
@@ -1078,13 +1221,7 @@
           <a:lstStyle/>
           <a:p>
             <a:r>
-              <a:t>Too much alpha stacks cells; too little barely moves. Lock the iteration count and alpha so your eighteen point seven golden stays stable.</a:t>
-            </a:r>
-          </a:p>
-          <a:p/>
-          <a:p>
-            <a:r>
-              <a:t>&lt;!-- /algorithm-walkthrough --&gt;</a:t>
+              <a:t>Default five iterations land near eighteen point seven—clearly better than fifty-two, still above the compact golden fourteen.</a:t>
             </a:r>
           </a:p>
         </p:txBody>
@@ -1154,7 +1291,7 @@
           <a:lstStyle/>
           <a:p>
             <a:r>
-              <a:t>In the browser lab track, open the **force-directed-place** lab from the tools shelf. Load the starter placement, run the algorithm once, and read HPWL—and density when the panel shows it. Work the challenges that lock the goldens, then come back to implement the same loop yourself.</a:t>
+              <a:t>Golden fourteen is tighter still. Force is a cheap continuous move—good teaching progress without claiming the absolute minimum.</a:t>
             </a:r>
           </a:p>
         </p:txBody>
@@ -1224,7 +1361,7 @@
           <a:lstStyle/>
           <a:p>
             <a:r>
-              <a:t>In the implement track, open this module’s examples and the course `common/` solvers. Parse `tiny_place.json`, run the algorithm with a deterministic seed, and print coordinates plus HPWL. Match the browser goldens before you claim the checklist.</a:t>
+              <a:t>Too much alpha stacks cells; too little barely moves. Lock the iteration count and alpha so your eighteen point seven golden stays stable.</a:t>
             </a:r>
           </a:p>
         </p:txBody>
@@ -4382,21 +4519,45 @@
                 </a:solidFill>
                 <a:latin typeface="Calibri"/>
               </a:rPr>
-              <a:t>Pitfalls</a:t>
-            </a:r>
-          </a:p>
-        </p:txBody>
-      </p:sp>
-      <p:sp>
-        <p:nvSpPr>
-          <p:cNvPr id="3" name="TextBox 2"/>
+              <a:t>Alpha trades speed vs collapse</a:t>
+            </a:r>
+          </a:p>
+        </p:txBody>
+      </p:sp>
+      <p:pic>
+        <p:nvPicPr>
+          <p:cNvPr id="3" name="Picture 2" descr="05-takeaway.png"/>
+          <p:cNvPicPr>
+            <a:picLocks noChangeAspect="1"/>
+          </p:cNvPicPr>
+          <p:nvPr/>
+        </p:nvPicPr>
+        <p:blipFill>
+          <a:blip r:embed="rId2"/>
+          <a:stretch>
+            <a:fillRect/>
+          </a:stretch>
+        </p:blipFill>
+        <p:spPr>
+          <a:xfrm>
+            <a:off x="548640" y="1143000"/>
+            <a:ext cx="9404113" cy="4572000"/>
+          </a:xfrm>
+          <a:prstGeom prst="rect">
+            <a:avLst/>
+          </a:prstGeom>
+        </p:spPr>
+      </p:pic>
+      <p:sp>
+        <p:nvSpPr>
+          <p:cNvPr id="4" name="TextBox 3"/>
           <p:cNvSpPr txBox="1"/>
           <p:nvPr/>
         </p:nvSpPr>
         <p:spPr>
           <a:xfrm>
-            <a:off x="548640" y="1234440"/>
-            <a:ext cx="11064240" cy="4937760"/>
+            <a:off x="548640" y="5897880"/>
+            <a:ext cx="11064240" cy="411480"/>
           </a:xfrm>
           <a:prstGeom prst="rect">
             <a:avLst/>
@@ -4409,32 +4570,26 @@
           </a:bodyPr>
           <a:lstStyle/>
           <a:p>
-            <a:pPr lvl="0" marL="457200" indent="-228600">
-              <a:buFont typeface="Calibri"/>
-              <a:spcAft>
-                <a:spcPts val="1000"/>
-              </a:spcAft>
-              <a:buSzPct val="100000"/>
-              <a:buChar char="•"/>
+            <a:pPr>
               <a:lnSpc>
                 <a:spcPts val="2200"/>
               </a:lnSpc>
             </a:pPr>
             <a:r>
-              <a:rPr sz="2000" b="0">
+              <a:rPr sz="1200" b="0">
                 <a:solidFill>
                   <a:srgbClr val="333333"/>
                 </a:solidFill>
                 <a:latin typeface="Calibri"/>
               </a:rPr>
-              <a:t>Common traps</a:t>
-            </a:r>
-          </a:p>
-        </p:txBody>
-      </p:sp>
-      <p:sp>
-        <p:nvSpPr>
-          <p:cNvPr id="4" name="TextBox 3"/>
+              <a:t>Alpha trades speed vs collapse</a:t>
+            </a:r>
+          </a:p>
+        </p:txBody>
+      </p:sp>
+      <p:sp>
+        <p:nvSpPr>
+          <p:cNvPr id="5" name="TextBox 4"/>
           <p:cNvSpPr txBox="1"/>
           <p:nvPr/>
         </p:nvSpPr>
@@ -4523,6 +4678,535 @@
                 </a:solidFill>
                 <a:latin typeface="Calibri"/>
               </a:rPr>
+              <a:t>Browser lab track</a:t>
+            </a:r>
+          </a:p>
+        </p:txBody>
+      </p:sp>
+      <p:sp>
+        <p:nvSpPr>
+          <p:cNvPr id="3" name="TextBox 2"/>
+          <p:cNvSpPr txBox="1"/>
+          <p:nvPr/>
+        </p:nvSpPr>
+        <p:spPr>
+          <a:xfrm>
+            <a:off x="548640" y="1234440"/>
+            <a:ext cx="11064240" cy="4937760"/>
+          </a:xfrm>
+          <a:prstGeom prst="rect">
+            <a:avLst/>
+          </a:prstGeom>
+          <a:noFill/>
+        </p:spPr>
+        <p:txBody>
+          <a:bodyPr wrap="square">
+            <a:noAutofit/>
+          </a:bodyPr>
+          <a:lstStyle/>
+          <a:p>
+            <a:pPr lvl="0" marL="457200" indent="-228600">
+              <a:buFont typeface="Calibri"/>
+              <a:spcAft>
+                <a:spcPts val="1000"/>
+              </a:spcAft>
+              <a:buSzPct val="100000"/>
+              <a:buChar char="•"/>
+              <a:lnSpc>
+                <a:spcPts val="2200"/>
+              </a:lnSpc>
+            </a:pPr>
+            <a:r>
+              <a:rPr sz="2000" b="0">
+                <a:solidFill>
+                  <a:srgbClr val="333333"/>
+                </a:solidFill>
+                <a:latin typeface="Calibri"/>
+              </a:rPr>
+              <a:t>In the browser lab track, open the </a:t>
+            </a:r>
+            <a:r>
+              <a:rPr sz="2000" b="1">
+                <a:solidFill>
+                  <a:srgbClr val="333333"/>
+                </a:solidFill>
+                <a:latin typeface="Calibri"/>
+              </a:rPr>
+              <a:t>force-directed-place</a:t>
+            </a:r>
+            <a:r>
+              <a:rPr sz="2000" b="0">
+                <a:solidFill>
+                  <a:srgbClr val="333333"/>
+                </a:solidFill>
+                <a:latin typeface="Calibri"/>
+              </a:rPr>
+              <a:t> lab from the tools shelf</a:t>
+            </a:r>
+          </a:p>
+          <a:p>
+            <a:pPr lvl="0" marL="457200" indent="-228600">
+              <a:buFont typeface="Calibri"/>
+              <a:spcAft>
+                <a:spcPts val="1000"/>
+              </a:spcAft>
+              <a:buSzPct val="100000"/>
+              <a:buChar char="•"/>
+              <a:lnSpc>
+                <a:spcPts val="2200"/>
+              </a:lnSpc>
+            </a:pPr>
+            <a:r>
+              <a:rPr sz="2000" b="0">
+                <a:solidFill>
+                  <a:srgbClr val="333333"/>
+                </a:solidFill>
+                <a:latin typeface="Calibri"/>
+              </a:rPr>
+              <a:t>Load the starter placement, run the algorithm once</a:t>
+            </a:r>
+          </a:p>
+          <a:p>
+            <a:pPr lvl="0" marL="457200" indent="-228600">
+              <a:buFont typeface="Calibri"/>
+              <a:spcAft>
+                <a:spcPts val="1000"/>
+              </a:spcAft>
+              <a:buSzPct val="100000"/>
+              <a:buChar char="•"/>
+              <a:lnSpc>
+                <a:spcPts val="2200"/>
+              </a:lnSpc>
+            </a:pPr>
+            <a:r>
+              <a:rPr sz="2000" b="0">
+                <a:solidFill>
+                  <a:srgbClr val="333333"/>
+                </a:solidFill>
+                <a:latin typeface="Calibri"/>
+              </a:rPr>
+              <a:t>Work the challenges that lock the goldens</a:t>
+            </a:r>
+          </a:p>
+        </p:txBody>
+      </p:sp>
+      <p:sp>
+        <p:nvSpPr>
+          <p:cNvPr id="4" name="TextBox 3"/>
+          <p:cNvSpPr txBox="1"/>
+          <p:nvPr/>
+        </p:nvSpPr>
+        <p:spPr>
+          <a:xfrm>
+            <a:off x="548640" y="6355080"/>
+            <a:ext cx="11064240" cy="320040"/>
+          </a:xfrm>
+          <a:prstGeom prst="rect">
+            <a:avLst/>
+          </a:prstGeom>
+          <a:noFill/>
+        </p:spPr>
+        <p:txBody>
+          <a:bodyPr wrap="square">
+            <a:noAutofit/>
+          </a:bodyPr>
+          <a:lstStyle/>
+          <a:p>
+            <a:pPr algn="r">
+              <a:lnSpc>
+                <a:spcPts val="2200"/>
+              </a:lnSpc>
+              <a:defRPr sz="1000" b="0">
+                <a:solidFill>
+                  <a:srgbClr val="666666"/>
+                </a:solidFill>
+                <a:latin typeface="Calibri"/>
+              </a:defRPr>
+            </a:pPr>
+            <a:r>
+              <a:t>learn_placement — 01 force directed place</a:t>
+            </a:r>
+          </a:p>
+        </p:txBody>
+      </p:sp>
+    </p:spTree>
+  </p:cSld>
+  <p:clrMapOvr>
+    <a:masterClrMapping/>
+  </p:clrMapOvr>
+</p:sld>
+</file>
+
+<file path=ppt/slides/slide12.xml><?xml version="1.0" encoding="utf-8"?>
+<p:sld xmlns:a="http://schemas.openxmlformats.org/drawingml/2006/main" xmlns:p="http://schemas.openxmlformats.org/presentationml/2006/main" xmlns:r="http://schemas.openxmlformats.org/officeDocument/2006/relationships">
+  <p:cSld>
+    <p:spTree>
+      <p:nvGrpSpPr>
+        <p:cNvPr id="1" name=""/>
+        <p:cNvGrpSpPr/>
+        <p:nvPr/>
+      </p:nvGrpSpPr>
+      <p:grpSpPr/>
+      <p:sp>
+        <p:nvSpPr>
+          <p:cNvPr id="2" name="TextBox 1"/>
+          <p:cNvSpPr txBox="1"/>
+          <p:nvPr/>
+        </p:nvSpPr>
+        <p:spPr>
+          <a:xfrm>
+            <a:off x="548640" y="411480"/>
+            <a:ext cx="11064240" cy="777240"/>
+          </a:xfrm>
+          <a:prstGeom prst="rect">
+            <a:avLst/>
+          </a:prstGeom>
+          <a:noFill/>
+        </p:spPr>
+        <p:txBody>
+          <a:bodyPr wrap="square">
+            <a:noAutofit/>
+          </a:bodyPr>
+          <a:lstStyle/>
+          <a:p>
+            <a:pPr>
+              <a:lnSpc>
+                <a:spcPts val="2200"/>
+              </a:lnSpc>
+            </a:pPr>
+            <a:r>
+              <a:rPr sz="2800" b="1">
+                <a:solidFill>
+                  <a:srgbClr val="1A1A2E"/>
+                </a:solidFill>
+                <a:latin typeface="Calibri"/>
+              </a:rPr>
+              <a:t>Implement track</a:t>
+            </a:r>
+          </a:p>
+        </p:txBody>
+      </p:sp>
+      <p:sp>
+        <p:nvSpPr>
+          <p:cNvPr id="3" name="TextBox 2"/>
+          <p:cNvSpPr txBox="1"/>
+          <p:nvPr/>
+        </p:nvSpPr>
+        <p:spPr>
+          <a:xfrm>
+            <a:off x="548640" y="1234440"/>
+            <a:ext cx="11064240" cy="4937760"/>
+          </a:xfrm>
+          <a:prstGeom prst="rect">
+            <a:avLst/>
+          </a:prstGeom>
+          <a:noFill/>
+        </p:spPr>
+        <p:txBody>
+          <a:bodyPr wrap="square">
+            <a:noAutofit/>
+          </a:bodyPr>
+          <a:lstStyle/>
+          <a:p>
+            <a:pPr lvl="0" marL="457200" indent="-228600">
+              <a:buFont typeface="Calibri"/>
+              <a:spcAft>
+                <a:spcPts val="1000"/>
+              </a:spcAft>
+              <a:buSzPct val="100000"/>
+              <a:buChar char="•"/>
+              <a:lnSpc>
+                <a:spcPts val="2200"/>
+              </a:lnSpc>
+            </a:pPr>
+            <a:r>
+              <a:rPr sz="2000" b="0">
+                <a:solidFill>
+                  <a:srgbClr val="333333"/>
+                </a:solidFill>
+                <a:latin typeface="Calibri"/>
+              </a:rPr>
+              <a:t>In the implement track</a:t>
+            </a:r>
+          </a:p>
+          <a:p>
+            <a:pPr lvl="0" marL="457200" indent="-228600">
+              <a:buFont typeface="Calibri"/>
+              <a:spcAft>
+                <a:spcPts val="1000"/>
+              </a:spcAft>
+              <a:buSzPct val="100000"/>
+              <a:buChar char="•"/>
+              <a:lnSpc>
+                <a:spcPts val="2200"/>
+              </a:lnSpc>
+            </a:pPr>
+            <a:r>
+              <a:rPr sz="2000" b="0">
+                <a:solidFill>
+                  <a:srgbClr val="333333"/>
+                </a:solidFill>
+                <a:latin typeface="Calibri"/>
+              </a:rPr>
+              <a:t>Parse `tiny_place.json`, run the algorithm with a deterministic seed</a:t>
+            </a:r>
+          </a:p>
+          <a:p>
+            <a:pPr lvl="0" marL="457200" indent="-228600">
+              <a:buFont typeface="Calibri"/>
+              <a:spcAft>
+                <a:spcPts val="1000"/>
+              </a:spcAft>
+              <a:buSzPct val="100000"/>
+              <a:buChar char="•"/>
+              <a:lnSpc>
+                <a:spcPts val="2200"/>
+              </a:lnSpc>
+            </a:pPr>
+            <a:r>
+              <a:rPr sz="2000" b="0">
+                <a:solidFill>
+                  <a:srgbClr val="333333"/>
+                </a:solidFill>
+                <a:latin typeface="Calibri"/>
+              </a:rPr>
+              <a:t>Match the browser goldens before you claim the checklist</a:t>
+            </a:r>
+          </a:p>
+        </p:txBody>
+      </p:sp>
+      <p:sp>
+        <p:nvSpPr>
+          <p:cNvPr id="4" name="TextBox 3"/>
+          <p:cNvSpPr txBox="1"/>
+          <p:nvPr/>
+        </p:nvSpPr>
+        <p:spPr>
+          <a:xfrm>
+            <a:off x="548640" y="6355080"/>
+            <a:ext cx="11064240" cy="320040"/>
+          </a:xfrm>
+          <a:prstGeom prst="rect">
+            <a:avLst/>
+          </a:prstGeom>
+          <a:noFill/>
+        </p:spPr>
+        <p:txBody>
+          <a:bodyPr wrap="square">
+            <a:noAutofit/>
+          </a:bodyPr>
+          <a:lstStyle/>
+          <a:p>
+            <a:pPr algn="r">
+              <a:lnSpc>
+                <a:spcPts val="2200"/>
+              </a:lnSpc>
+              <a:defRPr sz="1000" b="0">
+                <a:solidFill>
+                  <a:srgbClr val="666666"/>
+                </a:solidFill>
+                <a:latin typeface="Calibri"/>
+              </a:defRPr>
+            </a:pPr>
+            <a:r>
+              <a:t>learn_placement — 01 force directed place</a:t>
+            </a:r>
+          </a:p>
+        </p:txBody>
+      </p:sp>
+    </p:spTree>
+  </p:cSld>
+  <p:clrMapOvr>
+    <a:masterClrMapping/>
+  </p:clrMapOvr>
+</p:sld>
+</file>
+
+<file path=ppt/slides/slide13.xml><?xml version="1.0" encoding="utf-8"?>
+<p:sld xmlns:a="http://schemas.openxmlformats.org/drawingml/2006/main" xmlns:p="http://schemas.openxmlformats.org/presentationml/2006/main" xmlns:r="http://schemas.openxmlformats.org/officeDocument/2006/relationships">
+  <p:cSld>
+    <p:spTree>
+      <p:nvGrpSpPr>
+        <p:cNvPr id="1" name=""/>
+        <p:cNvGrpSpPr/>
+        <p:nvPr/>
+      </p:nvGrpSpPr>
+      <p:grpSpPr/>
+      <p:sp>
+        <p:nvSpPr>
+          <p:cNvPr id="2" name="TextBox 1"/>
+          <p:cNvSpPr txBox="1"/>
+          <p:nvPr/>
+        </p:nvSpPr>
+        <p:spPr>
+          <a:xfrm>
+            <a:off x="548640" y="411480"/>
+            <a:ext cx="11064240" cy="777240"/>
+          </a:xfrm>
+          <a:prstGeom prst="rect">
+            <a:avLst/>
+          </a:prstGeom>
+          <a:noFill/>
+        </p:spPr>
+        <p:txBody>
+          <a:bodyPr wrap="square">
+            <a:noAutofit/>
+          </a:bodyPr>
+          <a:lstStyle/>
+          <a:p>
+            <a:pPr>
+              <a:lnSpc>
+                <a:spcPts val="2200"/>
+              </a:lnSpc>
+            </a:pPr>
+            <a:r>
+              <a:rPr sz="2800" b="1">
+                <a:solidFill>
+                  <a:srgbClr val="1A1A2E"/>
+                </a:solidFill>
+                <a:latin typeface="Calibri"/>
+              </a:rPr>
+              <a:t>Pitfalls</a:t>
+            </a:r>
+          </a:p>
+        </p:txBody>
+      </p:sp>
+      <p:sp>
+        <p:nvSpPr>
+          <p:cNvPr id="3" name="TextBox 2"/>
+          <p:cNvSpPr txBox="1"/>
+          <p:nvPr/>
+        </p:nvSpPr>
+        <p:spPr>
+          <a:xfrm>
+            <a:off x="548640" y="1234440"/>
+            <a:ext cx="11064240" cy="4937760"/>
+          </a:xfrm>
+          <a:prstGeom prst="rect">
+            <a:avLst/>
+          </a:prstGeom>
+          <a:noFill/>
+        </p:spPr>
+        <p:txBody>
+          <a:bodyPr wrap="square">
+            <a:noAutofit/>
+          </a:bodyPr>
+          <a:lstStyle/>
+          <a:p>
+            <a:pPr lvl="0" marL="457200" indent="-228600">
+              <a:buFont typeface="Calibri"/>
+              <a:spcAft>
+                <a:spcPts val="1000"/>
+              </a:spcAft>
+              <a:buSzPct val="100000"/>
+              <a:buChar char="•"/>
+              <a:lnSpc>
+                <a:spcPts val="2200"/>
+              </a:lnSpc>
+            </a:pPr>
+            <a:r>
+              <a:rPr sz="2000" b="0">
+                <a:solidFill>
+                  <a:srgbClr val="333333"/>
+                </a:solidFill>
+                <a:latin typeface="Calibri"/>
+              </a:rPr>
+              <a:t>Common traps</a:t>
+            </a:r>
+          </a:p>
+        </p:txBody>
+      </p:sp>
+      <p:sp>
+        <p:nvSpPr>
+          <p:cNvPr id="4" name="TextBox 3"/>
+          <p:cNvSpPr txBox="1"/>
+          <p:nvPr/>
+        </p:nvSpPr>
+        <p:spPr>
+          <a:xfrm>
+            <a:off x="548640" y="6355080"/>
+            <a:ext cx="11064240" cy="320040"/>
+          </a:xfrm>
+          <a:prstGeom prst="rect">
+            <a:avLst/>
+          </a:prstGeom>
+          <a:noFill/>
+        </p:spPr>
+        <p:txBody>
+          <a:bodyPr wrap="square">
+            <a:noAutofit/>
+          </a:bodyPr>
+          <a:lstStyle/>
+          <a:p>
+            <a:pPr algn="r">
+              <a:lnSpc>
+                <a:spcPts val="2200"/>
+              </a:lnSpc>
+              <a:defRPr sz="1000" b="0">
+                <a:solidFill>
+                  <a:srgbClr val="666666"/>
+                </a:solidFill>
+                <a:latin typeface="Calibri"/>
+              </a:defRPr>
+            </a:pPr>
+            <a:r>
+              <a:t>learn_placement — 01 force directed place</a:t>
+            </a:r>
+          </a:p>
+        </p:txBody>
+      </p:sp>
+    </p:spTree>
+  </p:cSld>
+  <p:clrMapOvr>
+    <a:masterClrMapping/>
+  </p:clrMapOvr>
+</p:sld>
+</file>
+
+<file path=ppt/slides/slide14.xml><?xml version="1.0" encoding="utf-8"?>
+<p:sld xmlns:a="http://schemas.openxmlformats.org/drawingml/2006/main" xmlns:p="http://schemas.openxmlformats.org/presentationml/2006/main" xmlns:r="http://schemas.openxmlformats.org/officeDocument/2006/relationships">
+  <p:cSld>
+    <p:spTree>
+      <p:nvGrpSpPr>
+        <p:cNvPr id="1" name=""/>
+        <p:cNvGrpSpPr/>
+        <p:nvPr/>
+      </p:nvGrpSpPr>
+      <p:grpSpPr/>
+      <p:sp>
+        <p:nvSpPr>
+          <p:cNvPr id="2" name="TextBox 1"/>
+          <p:cNvSpPr txBox="1"/>
+          <p:nvPr/>
+        </p:nvSpPr>
+        <p:spPr>
+          <a:xfrm>
+            <a:off x="548640" y="411480"/>
+            <a:ext cx="11064240" cy="777240"/>
+          </a:xfrm>
+          <a:prstGeom prst="rect">
+            <a:avLst/>
+          </a:prstGeom>
+          <a:noFill/>
+        </p:spPr>
+        <p:txBody>
+          <a:bodyPr wrap="square">
+            <a:noAutofit/>
+          </a:bodyPr>
+          <a:lstStyle/>
+          <a:p>
+            <a:pPr>
+              <a:lnSpc>
+                <a:spcPts val="2200"/>
+              </a:lnSpc>
+            </a:pPr>
+            <a:r>
+              <a:rPr sz="2800" b="1">
+                <a:solidFill>
+                  <a:srgbClr val="1A1A2E"/>
+                </a:solidFill>
+                <a:latin typeface="Calibri"/>
+              </a:rPr>
               <a:t>Your turn</a:t>
             </a:r>
           </a:p>
@@ -4822,6 +5506,125 @@
               <a:t>Report HPWL before and after with the same net model</a:t>
             </a:r>
           </a:p>
+        </p:txBody>
+      </p:sp>
+      <p:sp>
+        <p:nvSpPr>
+          <p:cNvPr id="4" name="TextBox 3"/>
+          <p:cNvSpPr txBox="1"/>
+          <p:nvPr/>
+        </p:nvSpPr>
+        <p:spPr>
+          <a:xfrm>
+            <a:off x="548640" y="6355080"/>
+            <a:ext cx="11064240" cy="320040"/>
+          </a:xfrm>
+          <a:prstGeom prst="rect">
+            <a:avLst/>
+          </a:prstGeom>
+          <a:noFill/>
+        </p:spPr>
+        <p:txBody>
+          <a:bodyPr wrap="square">
+            <a:noAutofit/>
+          </a:bodyPr>
+          <a:lstStyle/>
+          <a:p>
+            <a:pPr algn="r">
+              <a:lnSpc>
+                <a:spcPts val="2200"/>
+              </a:lnSpc>
+              <a:defRPr sz="1000" b="0">
+                <a:solidFill>
+                  <a:srgbClr val="666666"/>
+                </a:solidFill>
+                <a:latin typeface="Calibri"/>
+              </a:defRPr>
+            </a:pPr>
+            <a:r>
+              <a:t>learn_placement — 01 force directed place</a:t>
+            </a:r>
+          </a:p>
+        </p:txBody>
+      </p:sp>
+    </p:spTree>
+  </p:cSld>
+  <p:clrMapOvr>
+    <a:masterClrMapping/>
+  </p:clrMapOvr>
+</p:sld>
+</file>
+
+<file path=ppt/slides/slide3.xml><?xml version="1.0" encoding="utf-8"?>
+<p:sld xmlns:a="http://schemas.openxmlformats.org/drawingml/2006/main" xmlns:p="http://schemas.openxmlformats.org/presentationml/2006/main" xmlns:r="http://schemas.openxmlformats.org/officeDocument/2006/relationships">
+  <p:cSld>
+    <p:spTree>
+      <p:nvGrpSpPr>
+        <p:cNvPr id="1" name=""/>
+        <p:cNvGrpSpPr/>
+        <p:nvPr/>
+      </p:nvGrpSpPr>
+      <p:grpSpPr/>
+      <p:sp>
+        <p:nvSpPr>
+          <p:cNvPr id="2" name="TextBox 1"/>
+          <p:cNvSpPr txBox="1"/>
+          <p:nvPr/>
+        </p:nvSpPr>
+        <p:spPr>
+          <a:xfrm>
+            <a:off x="548640" y="411480"/>
+            <a:ext cx="11064240" cy="777240"/>
+          </a:xfrm>
+          <a:prstGeom prst="rect">
+            <a:avLst/>
+          </a:prstGeom>
+          <a:noFill/>
+        </p:spPr>
+        <p:txBody>
+          <a:bodyPr wrap="square">
+            <a:noAutofit/>
+          </a:bodyPr>
+          <a:lstStyle/>
+          <a:p>
+            <a:pPr>
+              <a:lnSpc>
+                <a:spcPts val="2200"/>
+              </a:lnSpc>
+            </a:pPr>
+            <a:r>
+              <a:rPr sz="2800" b="1">
+                <a:solidFill>
+                  <a:srgbClr val="1A1A2E"/>
+                </a:solidFill>
+                <a:latin typeface="Calibri"/>
+              </a:rPr>
+              <a:t>Pseudocode</a:t>
+            </a:r>
+          </a:p>
+        </p:txBody>
+      </p:sp>
+      <p:sp>
+        <p:nvSpPr>
+          <p:cNvPr id="3" name="TextBox 2"/>
+          <p:cNvSpPr txBox="1"/>
+          <p:nvPr/>
+        </p:nvSpPr>
+        <p:spPr>
+          <a:xfrm>
+            <a:off x="548640" y="1234440"/>
+            <a:ext cx="11064240" cy="4937760"/>
+          </a:xfrm>
+          <a:prstGeom prst="rect">
+            <a:avLst/>
+          </a:prstGeom>
+          <a:noFill/>
+        </p:spPr>
+        <p:txBody>
+          <a:bodyPr wrap="square">
+            <a:noAutofit/>
+          </a:bodyPr>
+          <a:lstStyle/>
           <a:p>
             <a:pPr lvl="0" marL="457200" indent="-228600">
               <a:buFont typeface="Calibri"/>
@@ -4841,7 +5644,73 @@
                 </a:solidFill>
                 <a:latin typeface="Calibri"/>
               </a:rPr>
-              <a:t>&lt;!-- algorithm-walkthrough --&gt;</a:t>
+              <a:t>Force-directed place blends each free cell toward its neighbor average with step alpha</a:t>
+            </a:r>
+          </a:p>
+          <a:p>
+            <a:pPr lvl="0" marL="457200" indent="-228600">
+              <a:buFont typeface="Calibri"/>
+              <a:spcAft>
+                <a:spcPts val="1000"/>
+              </a:spcAft>
+              <a:buSzPct val="100000"/>
+              <a:buChar char="•"/>
+              <a:lnSpc>
+                <a:spcPts val="2200"/>
+              </a:lnSpc>
+            </a:pPr>
+            <a:r>
+              <a:rPr sz="2000" b="0">
+                <a:solidFill>
+                  <a:srgbClr val="333333"/>
+                </a:solidFill>
+                <a:latin typeface="Calibri"/>
+              </a:rPr>
+              <a:t>Fixed pads do not move</a:t>
+            </a:r>
+          </a:p>
+          <a:p>
+            <a:pPr lvl="0" marL="457200" indent="-228600">
+              <a:buFont typeface="Calibri"/>
+              <a:spcAft>
+                <a:spcPts val="1000"/>
+              </a:spcAft>
+              <a:buSzPct val="100000"/>
+              <a:buChar char="•"/>
+              <a:lnSpc>
+                <a:spcPts val="2200"/>
+              </a:lnSpc>
+            </a:pPr>
+            <a:r>
+              <a:rPr sz="2000" b="0">
+                <a:solidFill>
+                  <a:srgbClr val="333333"/>
+                </a:solidFill>
+                <a:latin typeface="Calibri"/>
+              </a:rPr>
+              <a:t>Open this module's examples file and find the Pseudocode section</a:t>
+            </a:r>
+          </a:p>
+          <a:p>
+            <a:pPr lvl="0" marL="457200" indent="-228600">
+              <a:buFont typeface="Calibri"/>
+              <a:spcAft>
+                <a:spcPts val="1000"/>
+              </a:spcAft>
+              <a:buSzPct val="100000"/>
+              <a:buChar char="•"/>
+              <a:lnSpc>
+                <a:spcPts val="2200"/>
+              </a:lnSpc>
+            </a:pPr>
+            <a:r>
+              <a:rPr sz="2000" b="0">
+                <a:solidFill>
+                  <a:srgbClr val="333333"/>
+                </a:solidFill>
+                <a:latin typeface="Calibri"/>
+              </a:rPr>
+              <a:t>That written sketch is what you implement on the implement track and what the browser</a:t>
             </a:r>
           </a:p>
         </p:txBody>
@@ -4893,7 +5762,402 @@
 </p:sld>
 </file>
 
-<file path=ppt/slides/slide3.xml><?xml version="1.0" encoding="utf-8"?>
+<file path=ppt/slides/slide4.xml><?xml version="1.0" encoding="utf-8"?>
+<p:sld xmlns:a="http://schemas.openxmlformats.org/drawingml/2006/main" xmlns:p="http://schemas.openxmlformats.org/presentationml/2006/main" xmlns:r="http://schemas.openxmlformats.org/officeDocument/2006/relationships">
+  <p:cSld>
+    <p:spTree>
+      <p:nvGrpSpPr>
+        <p:cNvPr id="1" name=""/>
+        <p:cNvGrpSpPr/>
+        <p:nvPr/>
+      </p:nvGrpSpPr>
+      <p:grpSpPr/>
+      <p:sp>
+        <p:nvSpPr>
+          <p:cNvPr id="2" name="TextBox 1"/>
+          <p:cNvSpPr txBox="1"/>
+          <p:nvPr/>
+        </p:nvSpPr>
+        <p:spPr>
+          <a:xfrm>
+            <a:off x="548640" y="411480"/>
+            <a:ext cx="11064240" cy="777240"/>
+          </a:xfrm>
+          <a:prstGeom prst="rect">
+            <a:avLst/>
+          </a:prstGeom>
+          <a:noFill/>
+        </p:spPr>
+        <p:txBody>
+          <a:bodyPr wrap="square">
+            <a:noAutofit/>
+          </a:bodyPr>
+          <a:lstStyle/>
+          <a:p>
+            <a:pPr>
+              <a:lnSpc>
+                <a:spcPts val="2200"/>
+              </a:lnSpc>
+            </a:pPr>
+            <a:r>
+              <a:rPr sz="2800" b="1">
+                <a:solidFill>
+                  <a:srgbClr val="1A1A2E"/>
+                </a:solidFill>
+                <a:latin typeface="Calibri"/>
+              </a:rPr>
+              <a:t>Algorithm sketch</a:t>
+            </a:r>
+          </a:p>
+        </p:txBody>
+      </p:sp>
+      <p:sp>
+        <p:nvSpPr>
+          <p:cNvPr id="3" name="TextBox 2"/>
+          <p:cNvSpPr txBox="1"/>
+          <p:nvPr/>
+        </p:nvSpPr>
+        <p:spPr>
+          <a:xfrm>
+            <a:off x="548640" y="1234440"/>
+            <a:ext cx="11064240" cy="4937760"/>
+          </a:xfrm>
+          <a:prstGeom prst="rect">
+            <a:avLst/>
+          </a:prstGeom>
+          <a:noFill/>
+        </p:spPr>
+        <p:txBody>
+          <a:bodyPr wrap="square">
+            <a:noAutofit/>
+          </a:bodyPr>
+          <a:lstStyle/>
+          <a:p>
+            <a:pPr lvl="0" marL="457200" indent="-228600">
+              <a:buFont typeface="Calibri"/>
+              <a:spcAft>
+                <a:spcPts val="1000"/>
+              </a:spcAft>
+              <a:buSzPct val="100000"/>
+              <a:buChar char="•"/>
+              <a:lnSpc>
+                <a:spcPts val="2200"/>
+              </a:lnSpc>
+            </a:pPr>
+            <a:r>
+              <a:rPr sz="2000" b="0">
+                <a:solidFill>
+                  <a:srgbClr val="333333"/>
+                </a:solidFill>
+                <a:latin typeface="Calibri"/>
+              </a:rPr>
+              <a:t>From starter fifty-two</a:t>
+            </a:r>
+          </a:p>
+        </p:txBody>
+      </p:sp>
+      <p:sp>
+        <p:nvSpPr>
+          <p:cNvPr id="4" name="TextBox 3"/>
+          <p:cNvSpPr txBox="1"/>
+          <p:nvPr/>
+        </p:nvSpPr>
+        <p:spPr>
+          <a:xfrm>
+            <a:off x="548640" y="6355080"/>
+            <a:ext cx="11064240" cy="320040"/>
+          </a:xfrm>
+          <a:prstGeom prst="rect">
+            <a:avLst/>
+          </a:prstGeom>
+          <a:noFill/>
+        </p:spPr>
+        <p:txBody>
+          <a:bodyPr wrap="square">
+            <a:noAutofit/>
+          </a:bodyPr>
+          <a:lstStyle/>
+          <a:p>
+            <a:pPr algn="r">
+              <a:lnSpc>
+                <a:spcPts val="2200"/>
+              </a:lnSpc>
+              <a:defRPr sz="1000" b="0">
+                <a:solidFill>
+                  <a:srgbClr val="666666"/>
+                </a:solidFill>
+                <a:latin typeface="Calibri"/>
+              </a:defRPr>
+            </a:pPr>
+            <a:r>
+              <a:t>learn_placement — 01 force directed place</a:t>
+            </a:r>
+          </a:p>
+        </p:txBody>
+      </p:sp>
+    </p:spTree>
+  </p:cSld>
+  <p:clrMapOvr>
+    <a:masterClrMapping/>
+  </p:clrMapOvr>
+</p:sld>
+</file>
+
+<file path=ppt/slides/slide5.xml><?xml version="1.0" encoding="utf-8"?>
+<p:sld xmlns:a="http://schemas.openxmlformats.org/drawingml/2006/main" xmlns:p="http://schemas.openxmlformats.org/presentationml/2006/main" xmlns:r="http://schemas.openxmlformats.org/officeDocument/2006/relationships">
+  <p:cSld>
+    <p:spTree>
+      <p:nvGrpSpPr>
+        <p:cNvPr id="1" name=""/>
+        <p:cNvGrpSpPr/>
+        <p:nvPr/>
+      </p:nvGrpSpPr>
+      <p:grpSpPr/>
+      <p:sp>
+        <p:nvSpPr>
+          <p:cNvPr id="2" name="TextBox 1"/>
+          <p:cNvSpPr txBox="1"/>
+          <p:nvPr/>
+        </p:nvSpPr>
+        <p:spPr>
+          <a:xfrm>
+            <a:off x="548640" y="411480"/>
+            <a:ext cx="11064240" cy="777240"/>
+          </a:xfrm>
+          <a:prstGeom prst="rect">
+            <a:avLst/>
+          </a:prstGeom>
+          <a:noFill/>
+        </p:spPr>
+        <p:txBody>
+          <a:bodyPr wrap="square">
+            <a:noAutofit/>
+          </a:bodyPr>
+          <a:lstStyle/>
+          <a:p>
+            <a:pPr>
+              <a:lnSpc>
+                <a:spcPts val="2200"/>
+              </a:lnSpc>
+            </a:pPr>
+            <a:r>
+              <a:rPr sz="2800" b="1">
+                <a:solidFill>
+                  <a:srgbClr val="1A1A2E"/>
+                </a:solidFill>
+                <a:latin typeface="Calibri"/>
+              </a:rPr>
+              <a:t>Algorithm sketch — try these</a:t>
+            </a:r>
+          </a:p>
+        </p:txBody>
+      </p:sp>
+      <p:sp>
+        <p:nvSpPr>
+          <p:cNvPr id="3" name="TextBox 2"/>
+          <p:cNvSpPr txBox="1"/>
+          <p:nvPr/>
+        </p:nvSpPr>
+        <p:spPr>
+          <a:xfrm>
+            <a:off x="548640" y="1143000"/>
+            <a:ext cx="11064240" cy="5029200"/>
+          </a:xfrm>
+          <a:prstGeom prst="rect">
+            <a:avLst/>
+          </a:prstGeom>
+          <a:solidFill>
+            <a:srgbClr val="F4F4F4"/>
+          </a:solidFill>
+        </p:spPr>
+        <p:txBody>
+          <a:bodyPr wrap="square">
+            <a:noAutofit/>
+          </a:bodyPr>
+          <a:lstStyle/>
+          <a:p>
+            <a:pPr>
+              <a:lnSpc>
+                <a:spcPts val="2200"/>
+              </a:lnSpc>
+              <a:spcAft>
+                <a:spcPts val="400"/>
+              </a:spcAft>
+            </a:pPr>
+            <a:r>
+              <a:rPr sz="2000" b="0">
+                <a:solidFill>
+                  <a:srgbClr val="333333"/>
+                </a:solidFill>
+                <a:latin typeface="Consolas"/>
+              </a:rPr>
+              <a:t>INPUT: positions, nets, α, iters, fixed pads</a:t>
+            </a:r>
+          </a:p>
+          <a:p>
+            <a:pPr>
+              <a:lnSpc>
+                <a:spcPts val="2200"/>
+              </a:lnSpc>
+              <a:spcAft>
+                <a:spcPts val="400"/>
+              </a:spcAft>
+            </a:pPr>
+            <a:r>
+              <a:rPr sz="2000" b="0">
+                <a:solidFill>
+                  <a:srgbClr val="333333"/>
+                </a:solidFill>
+                <a:latin typeface="Consolas"/>
+              </a:rPr>
+              <a:t>OUTPUT: updated positions + HPWL</a:t>
+            </a:r>
+          </a:p>
+          <a:p>
+            <a:pPr>
+              <a:lnSpc>
+                <a:spcPts val="2200"/>
+              </a:lnSpc>
+              <a:spcAft>
+                <a:spcPts val="400"/>
+              </a:spcAft>
+            </a:pPr>
+            <a:r>
+              <a:rPr sz="2000" b="0">
+                <a:solidFill>
+                  <a:srgbClr val="333333"/>
+                </a:solidFill>
+                <a:latin typeface="Consolas"/>
+              </a:rPr>
+              <a:t>each iter, for free cell c:</a:t>
+            </a:r>
+          </a:p>
+          <a:p>
+            <a:pPr>
+              <a:lnSpc>
+                <a:spcPts val="2200"/>
+              </a:lnSpc>
+              <a:spcAft>
+                <a:spcPts val="400"/>
+              </a:spcAft>
+            </a:pPr>
+            <a:r>
+              <a:rPr sz="2000" b="0">
+                <a:solidFill>
+                  <a:srgbClr val="333333"/>
+                </a:solidFill>
+                <a:latin typeface="Consolas"/>
+              </a:rPr>
+              <a:t>  tgt ← avg neighbor coords (+ weak center)</a:t>
+            </a:r>
+          </a:p>
+          <a:p>
+            <a:pPr>
+              <a:lnSpc>
+                <a:spcPts val="2200"/>
+              </a:lnSpc>
+              <a:spcAft>
+                <a:spcPts val="400"/>
+              </a:spcAft>
+            </a:pPr>
+            <a:r>
+              <a:rPr sz="2000" b="0">
+                <a:solidFill>
+                  <a:srgbClr val="333333"/>
+                </a:solidFill>
+                <a:latin typeface="Consolas"/>
+              </a:rPr>
+              <a:t>  pos[c] ← (1−α)·pos[c] + α·tgt</a:t>
+            </a:r>
+          </a:p>
+          <a:p>
+            <a:pPr>
+              <a:lnSpc>
+                <a:spcPts val="2200"/>
+              </a:lnSpc>
+              <a:spcAft>
+                <a:spcPts val="400"/>
+              </a:spcAft>
+            </a:pPr>
+            <a:r>
+              <a:rPr sz="2000" b="0">
+                <a:solidFill>
+                  <a:srgbClr val="333333"/>
+                </a:solidFill>
+                <a:latin typeface="Consolas"/>
+              </a:rPr>
+              <a:t>pads stay fixed</a:t>
+            </a:r>
+          </a:p>
+          <a:p>
+            <a:pPr>
+              <a:lnSpc>
+                <a:spcPts val="2200"/>
+              </a:lnSpc>
+              <a:spcAft>
+                <a:spcPts val="400"/>
+              </a:spcAft>
+            </a:pPr>
+            <a:r>
+              <a:rPr sz="2000" b="0">
+                <a:solidFill>
+                  <a:srgbClr val="333333"/>
+                </a:solidFill>
+                <a:latin typeface="Consolas"/>
+              </a:rPr>
+              <a:t>GOLDEN starter 52 → ≈18.7 after defaults</a:t>
+            </a:r>
+          </a:p>
+        </p:txBody>
+      </p:sp>
+      <p:sp>
+        <p:nvSpPr>
+          <p:cNvPr id="4" name="TextBox 3"/>
+          <p:cNvSpPr txBox="1"/>
+          <p:nvPr/>
+        </p:nvSpPr>
+        <p:spPr>
+          <a:xfrm>
+            <a:off x="548640" y="6355080"/>
+            <a:ext cx="11064240" cy="320040"/>
+          </a:xfrm>
+          <a:prstGeom prst="rect">
+            <a:avLst/>
+          </a:prstGeom>
+          <a:noFill/>
+        </p:spPr>
+        <p:txBody>
+          <a:bodyPr wrap="square">
+            <a:noAutofit/>
+          </a:bodyPr>
+          <a:lstStyle/>
+          <a:p>
+            <a:pPr algn="r">
+              <a:lnSpc>
+                <a:spcPts val="2200"/>
+              </a:lnSpc>
+              <a:defRPr sz="1000" b="0">
+                <a:solidFill>
+                  <a:srgbClr val="666666"/>
+                </a:solidFill>
+                <a:latin typeface="Calibri"/>
+              </a:defRPr>
+            </a:pPr>
+            <a:r>
+              <a:t>learn_placement — 01 force directed place</a:t>
+            </a:r>
+          </a:p>
+        </p:txBody>
+      </p:sp>
+    </p:spTree>
+  </p:cSld>
+  <p:clrMapOvr>
+    <a:masterClrMapping/>
+  </p:clrMapOvr>
+</p:sld>
+</file>
+
+<file path=ppt/slides/slide6.xml><?xml version="1.0" encoding="utf-8"?>
 <p:sld xmlns:a="http://schemas.openxmlformats.org/drawingml/2006/main" xmlns:p="http://schemas.openxmlformats.org/presentationml/2006/main" xmlns:r="http://schemas.openxmlformats.org/officeDocument/2006/relationships">
   <p:cSld>
     <p:spTree>
@@ -5052,7 +6316,7 @@
 </p:sld>
 </file>
 
-<file path=ppt/slides/slide4.xml><?xml version="1.0" encoding="utf-8"?>
+<file path=ppt/slides/slide7.xml><?xml version="1.0" encoding="utf-8"?>
 <p:sld xmlns:a="http://schemas.openxmlformats.org/drawingml/2006/main" xmlns:p="http://schemas.openxmlformats.org/presentationml/2006/main" xmlns:r="http://schemas.openxmlformats.org/officeDocument/2006/relationships">
   <p:cSld>
     <p:spTree>
@@ -5211,7 +6475,7 @@
 </p:sld>
 </file>
 
-<file path=ppt/slides/slide5.xml><?xml version="1.0" encoding="utf-8"?>
+<file path=ppt/slides/slide8.xml><?xml version="1.0" encoding="utf-8"?>
 <p:sld xmlns:a="http://schemas.openxmlformats.org/drawingml/2006/main" xmlns:p="http://schemas.openxmlformats.org/presentationml/2006/main" xmlns:r="http://schemas.openxmlformats.org/officeDocument/2006/relationships">
   <p:cSld>
     <p:spTree>
@@ -5370,7 +6634,7 @@
 </p:sld>
 </file>
 
-<file path=ppt/slides/slide6.xml><?xml version="1.0" encoding="utf-8"?>
+<file path=ppt/slides/slide9.xml><?xml version="1.0" encoding="utf-8"?>
 <p:sld xmlns:a="http://schemas.openxmlformats.org/drawingml/2006/main" xmlns:p="http://schemas.openxmlformats.org/presentationml/2006/main" xmlns:r="http://schemas.openxmlformats.org/officeDocument/2006/relationships">
   <p:cSld>
     <p:spTree>
@@ -5485,553 +6749,6 @@
       <p:sp>
         <p:nvSpPr>
           <p:cNvPr id="5" name="TextBox 4"/>
-          <p:cNvSpPr txBox="1"/>
-          <p:nvPr/>
-        </p:nvSpPr>
-        <p:spPr>
-          <a:xfrm>
-            <a:off x="548640" y="6355080"/>
-            <a:ext cx="11064240" cy="320040"/>
-          </a:xfrm>
-          <a:prstGeom prst="rect">
-            <a:avLst/>
-          </a:prstGeom>
-          <a:noFill/>
-        </p:spPr>
-        <p:txBody>
-          <a:bodyPr wrap="square">
-            <a:noAutofit/>
-          </a:bodyPr>
-          <a:lstStyle/>
-          <a:p>
-            <a:pPr algn="r">
-              <a:lnSpc>
-                <a:spcPts val="2200"/>
-              </a:lnSpc>
-              <a:defRPr sz="1000" b="0">
-                <a:solidFill>
-                  <a:srgbClr val="666666"/>
-                </a:solidFill>
-                <a:latin typeface="Calibri"/>
-              </a:defRPr>
-            </a:pPr>
-            <a:r>
-              <a:t>learn_placement — 01 force directed place</a:t>
-            </a:r>
-          </a:p>
-        </p:txBody>
-      </p:sp>
-    </p:spTree>
-  </p:cSld>
-  <p:clrMapOvr>
-    <a:masterClrMapping/>
-  </p:clrMapOvr>
-</p:sld>
-</file>
-
-<file path=ppt/slides/slide7.xml><?xml version="1.0" encoding="utf-8"?>
-<p:sld xmlns:a="http://schemas.openxmlformats.org/drawingml/2006/main" xmlns:p="http://schemas.openxmlformats.org/presentationml/2006/main" xmlns:r="http://schemas.openxmlformats.org/officeDocument/2006/relationships">
-  <p:cSld>
-    <p:spTree>
-      <p:nvGrpSpPr>
-        <p:cNvPr id="1" name=""/>
-        <p:cNvGrpSpPr/>
-        <p:nvPr/>
-      </p:nvGrpSpPr>
-      <p:grpSpPr/>
-      <p:sp>
-        <p:nvSpPr>
-          <p:cNvPr id="2" name="TextBox 1"/>
-          <p:cNvSpPr txBox="1"/>
-          <p:nvPr/>
-        </p:nvSpPr>
-        <p:spPr>
-          <a:xfrm>
-            <a:off x="548640" y="411480"/>
-            <a:ext cx="11064240" cy="777240"/>
-          </a:xfrm>
-          <a:prstGeom prst="rect">
-            <a:avLst/>
-          </a:prstGeom>
-          <a:noFill/>
-        </p:spPr>
-        <p:txBody>
-          <a:bodyPr wrap="square">
-            <a:noAutofit/>
-          </a:bodyPr>
-          <a:lstStyle/>
-          <a:p>
-            <a:pPr>
-              <a:lnSpc>
-                <a:spcPts val="2200"/>
-              </a:lnSpc>
-            </a:pPr>
-            <a:r>
-              <a:rPr sz="2800" b="1">
-                <a:solidFill>
-                  <a:srgbClr val="1A1A2E"/>
-                </a:solidFill>
-                <a:latin typeface="Calibri"/>
-              </a:rPr>
-              <a:t>Alpha trades speed vs collapse</a:t>
-            </a:r>
-          </a:p>
-        </p:txBody>
-      </p:sp>
-      <p:pic>
-        <p:nvPicPr>
-          <p:cNvPr id="3" name="Picture 2" descr="05-takeaway.png"/>
-          <p:cNvPicPr>
-            <a:picLocks noChangeAspect="1"/>
-          </p:cNvPicPr>
-          <p:nvPr/>
-        </p:nvPicPr>
-        <p:blipFill>
-          <a:blip r:embed="rId2"/>
-          <a:stretch>
-            <a:fillRect/>
-          </a:stretch>
-        </p:blipFill>
-        <p:spPr>
-          <a:xfrm>
-            <a:off x="548640" y="1143000"/>
-            <a:ext cx="9404113" cy="4572000"/>
-          </a:xfrm>
-          <a:prstGeom prst="rect">
-            <a:avLst/>
-          </a:prstGeom>
-        </p:spPr>
-      </p:pic>
-      <p:sp>
-        <p:nvSpPr>
-          <p:cNvPr id="4" name="TextBox 3"/>
-          <p:cNvSpPr txBox="1"/>
-          <p:nvPr/>
-        </p:nvSpPr>
-        <p:spPr>
-          <a:xfrm>
-            <a:off x="548640" y="5897880"/>
-            <a:ext cx="11064240" cy="411480"/>
-          </a:xfrm>
-          <a:prstGeom prst="rect">
-            <a:avLst/>
-          </a:prstGeom>
-          <a:noFill/>
-        </p:spPr>
-        <p:txBody>
-          <a:bodyPr wrap="square">
-            <a:noAutofit/>
-          </a:bodyPr>
-          <a:lstStyle/>
-          <a:p>
-            <a:pPr>
-              <a:lnSpc>
-                <a:spcPts val="2200"/>
-              </a:lnSpc>
-            </a:pPr>
-            <a:r>
-              <a:rPr sz="1200" b="0">
-                <a:solidFill>
-                  <a:srgbClr val="333333"/>
-                </a:solidFill>
-                <a:latin typeface="Calibri"/>
-              </a:rPr>
-              <a:t>Alpha trades speed vs collapse</a:t>
-            </a:r>
-          </a:p>
-        </p:txBody>
-      </p:sp>
-      <p:sp>
-        <p:nvSpPr>
-          <p:cNvPr id="5" name="TextBox 4"/>
-          <p:cNvSpPr txBox="1"/>
-          <p:nvPr/>
-        </p:nvSpPr>
-        <p:spPr>
-          <a:xfrm>
-            <a:off x="548640" y="6355080"/>
-            <a:ext cx="11064240" cy="320040"/>
-          </a:xfrm>
-          <a:prstGeom prst="rect">
-            <a:avLst/>
-          </a:prstGeom>
-          <a:noFill/>
-        </p:spPr>
-        <p:txBody>
-          <a:bodyPr wrap="square">
-            <a:noAutofit/>
-          </a:bodyPr>
-          <a:lstStyle/>
-          <a:p>
-            <a:pPr algn="r">
-              <a:lnSpc>
-                <a:spcPts val="2200"/>
-              </a:lnSpc>
-              <a:defRPr sz="1000" b="0">
-                <a:solidFill>
-                  <a:srgbClr val="666666"/>
-                </a:solidFill>
-                <a:latin typeface="Calibri"/>
-              </a:defRPr>
-            </a:pPr>
-            <a:r>
-              <a:t>learn_placement — 01 force directed place</a:t>
-            </a:r>
-          </a:p>
-        </p:txBody>
-      </p:sp>
-    </p:spTree>
-  </p:cSld>
-  <p:clrMapOvr>
-    <a:masterClrMapping/>
-  </p:clrMapOvr>
-</p:sld>
-</file>
-
-<file path=ppt/slides/slide8.xml><?xml version="1.0" encoding="utf-8"?>
-<p:sld xmlns:a="http://schemas.openxmlformats.org/drawingml/2006/main" xmlns:p="http://schemas.openxmlformats.org/presentationml/2006/main" xmlns:r="http://schemas.openxmlformats.org/officeDocument/2006/relationships">
-  <p:cSld>
-    <p:spTree>
-      <p:nvGrpSpPr>
-        <p:cNvPr id="1" name=""/>
-        <p:cNvGrpSpPr/>
-        <p:nvPr/>
-      </p:nvGrpSpPr>
-      <p:grpSpPr/>
-      <p:sp>
-        <p:nvSpPr>
-          <p:cNvPr id="2" name="TextBox 1"/>
-          <p:cNvSpPr txBox="1"/>
-          <p:nvPr/>
-        </p:nvSpPr>
-        <p:spPr>
-          <a:xfrm>
-            <a:off x="548640" y="411480"/>
-            <a:ext cx="11064240" cy="777240"/>
-          </a:xfrm>
-          <a:prstGeom prst="rect">
-            <a:avLst/>
-          </a:prstGeom>
-          <a:noFill/>
-        </p:spPr>
-        <p:txBody>
-          <a:bodyPr wrap="square">
-            <a:noAutofit/>
-          </a:bodyPr>
-          <a:lstStyle/>
-          <a:p>
-            <a:pPr>
-              <a:lnSpc>
-                <a:spcPts val="2200"/>
-              </a:lnSpc>
-            </a:pPr>
-            <a:r>
-              <a:rPr sz="2800" b="1">
-                <a:solidFill>
-                  <a:srgbClr val="1A1A2E"/>
-                </a:solidFill>
-                <a:latin typeface="Calibri"/>
-              </a:rPr>
-              <a:t>Browser lab track</a:t>
-            </a:r>
-          </a:p>
-        </p:txBody>
-      </p:sp>
-      <p:sp>
-        <p:nvSpPr>
-          <p:cNvPr id="3" name="TextBox 2"/>
-          <p:cNvSpPr txBox="1"/>
-          <p:nvPr/>
-        </p:nvSpPr>
-        <p:spPr>
-          <a:xfrm>
-            <a:off x="548640" y="1234440"/>
-            <a:ext cx="11064240" cy="4937760"/>
-          </a:xfrm>
-          <a:prstGeom prst="rect">
-            <a:avLst/>
-          </a:prstGeom>
-          <a:noFill/>
-        </p:spPr>
-        <p:txBody>
-          <a:bodyPr wrap="square">
-            <a:noAutofit/>
-          </a:bodyPr>
-          <a:lstStyle/>
-          <a:p>
-            <a:pPr lvl="0" marL="457200" indent="-228600">
-              <a:buFont typeface="Calibri"/>
-              <a:spcAft>
-                <a:spcPts val="1000"/>
-              </a:spcAft>
-              <a:buSzPct val="100000"/>
-              <a:buChar char="•"/>
-              <a:lnSpc>
-                <a:spcPts val="2200"/>
-              </a:lnSpc>
-            </a:pPr>
-            <a:r>
-              <a:rPr sz="2000" b="0">
-                <a:solidFill>
-                  <a:srgbClr val="333333"/>
-                </a:solidFill>
-                <a:latin typeface="Calibri"/>
-              </a:rPr>
-              <a:t>In the browser lab track, open the </a:t>
-            </a:r>
-            <a:r>
-              <a:rPr sz="2000" b="1">
-                <a:solidFill>
-                  <a:srgbClr val="333333"/>
-                </a:solidFill>
-                <a:latin typeface="Calibri"/>
-              </a:rPr>
-              <a:t>force-directed-place</a:t>
-            </a:r>
-            <a:r>
-              <a:rPr sz="2000" b="0">
-                <a:solidFill>
-                  <a:srgbClr val="333333"/>
-                </a:solidFill>
-                <a:latin typeface="Calibri"/>
-              </a:rPr>
-              <a:t> lab from the tools shelf</a:t>
-            </a:r>
-          </a:p>
-          <a:p>
-            <a:pPr lvl="0" marL="457200" indent="-228600">
-              <a:buFont typeface="Calibri"/>
-              <a:spcAft>
-                <a:spcPts val="1000"/>
-              </a:spcAft>
-              <a:buSzPct val="100000"/>
-              <a:buChar char="•"/>
-              <a:lnSpc>
-                <a:spcPts val="2200"/>
-              </a:lnSpc>
-            </a:pPr>
-            <a:r>
-              <a:rPr sz="2000" b="0">
-                <a:solidFill>
-                  <a:srgbClr val="333333"/>
-                </a:solidFill>
-                <a:latin typeface="Calibri"/>
-              </a:rPr>
-              <a:t>Load the starter placement, run the algorithm once</a:t>
-            </a:r>
-          </a:p>
-          <a:p>
-            <a:pPr lvl="0" marL="457200" indent="-228600">
-              <a:buFont typeface="Calibri"/>
-              <a:spcAft>
-                <a:spcPts val="1000"/>
-              </a:spcAft>
-              <a:buSzPct val="100000"/>
-              <a:buChar char="•"/>
-              <a:lnSpc>
-                <a:spcPts val="2200"/>
-              </a:lnSpc>
-            </a:pPr>
-            <a:r>
-              <a:rPr sz="2000" b="0">
-                <a:solidFill>
-                  <a:srgbClr val="333333"/>
-                </a:solidFill>
-                <a:latin typeface="Calibri"/>
-              </a:rPr>
-              <a:t>Work the challenges that lock the goldens</a:t>
-            </a:r>
-          </a:p>
-        </p:txBody>
-      </p:sp>
-      <p:sp>
-        <p:nvSpPr>
-          <p:cNvPr id="4" name="TextBox 3"/>
-          <p:cNvSpPr txBox="1"/>
-          <p:nvPr/>
-        </p:nvSpPr>
-        <p:spPr>
-          <a:xfrm>
-            <a:off x="548640" y="6355080"/>
-            <a:ext cx="11064240" cy="320040"/>
-          </a:xfrm>
-          <a:prstGeom prst="rect">
-            <a:avLst/>
-          </a:prstGeom>
-          <a:noFill/>
-        </p:spPr>
-        <p:txBody>
-          <a:bodyPr wrap="square">
-            <a:noAutofit/>
-          </a:bodyPr>
-          <a:lstStyle/>
-          <a:p>
-            <a:pPr algn="r">
-              <a:lnSpc>
-                <a:spcPts val="2200"/>
-              </a:lnSpc>
-              <a:defRPr sz="1000" b="0">
-                <a:solidFill>
-                  <a:srgbClr val="666666"/>
-                </a:solidFill>
-                <a:latin typeface="Calibri"/>
-              </a:defRPr>
-            </a:pPr>
-            <a:r>
-              <a:t>learn_placement — 01 force directed place</a:t>
-            </a:r>
-          </a:p>
-        </p:txBody>
-      </p:sp>
-    </p:spTree>
-  </p:cSld>
-  <p:clrMapOvr>
-    <a:masterClrMapping/>
-  </p:clrMapOvr>
-</p:sld>
-</file>
-
-<file path=ppt/slides/slide9.xml><?xml version="1.0" encoding="utf-8"?>
-<p:sld xmlns:a="http://schemas.openxmlformats.org/drawingml/2006/main" xmlns:p="http://schemas.openxmlformats.org/presentationml/2006/main" xmlns:r="http://schemas.openxmlformats.org/officeDocument/2006/relationships">
-  <p:cSld>
-    <p:spTree>
-      <p:nvGrpSpPr>
-        <p:cNvPr id="1" name=""/>
-        <p:cNvGrpSpPr/>
-        <p:nvPr/>
-      </p:nvGrpSpPr>
-      <p:grpSpPr/>
-      <p:sp>
-        <p:nvSpPr>
-          <p:cNvPr id="2" name="TextBox 1"/>
-          <p:cNvSpPr txBox="1"/>
-          <p:nvPr/>
-        </p:nvSpPr>
-        <p:spPr>
-          <a:xfrm>
-            <a:off x="548640" y="411480"/>
-            <a:ext cx="11064240" cy="777240"/>
-          </a:xfrm>
-          <a:prstGeom prst="rect">
-            <a:avLst/>
-          </a:prstGeom>
-          <a:noFill/>
-        </p:spPr>
-        <p:txBody>
-          <a:bodyPr wrap="square">
-            <a:noAutofit/>
-          </a:bodyPr>
-          <a:lstStyle/>
-          <a:p>
-            <a:pPr>
-              <a:lnSpc>
-                <a:spcPts val="2200"/>
-              </a:lnSpc>
-            </a:pPr>
-            <a:r>
-              <a:rPr sz="2800" b="1">
-                <a:solidFill>
-                  <a:srgbClr val="1A1A2E"/>
-                </a:solidFill>
-                <a:latin typeface="Calibri"/>
-              </a:rPr>
-              <a:t>Implement track</a:t>
-            </a:r>
-          </a:p>
-        </p:txBody>
-      </p:sp>
-      <p:sp>
-        <p:nvSpPr>
-          <p:cNvPr id="3" name="TextBox 2"/>
-          <p:cNvSpPr txBox="1"/>
-          <p:nvPr/>
-        </p:nvSpPr>
-        <p:spPr>
-          <a:xfrm>
-            <a:off x="548640" y="1234440"/>
-            <a:ext cx="11064240" cy="4937760"/>
-          </a:xfrm>
-          <a:prstGeom prst="rect">
-            <a:avLst/>
-          </a:prstGeom>
-          <a:noFill/>
-        </p:spPr>
-        <p:txBody>
-          <a:bodyPr wrap="square">
-            <a:noAutofit/>
-          </a:bodyPr>
-          <a:lstStyle/>
-          <a:p>
-            <a:pPr lvl="0" marL="457200" indent="-228600">
-              <a:buFont typeface="Calibri"/>
-              <a:spcAft>
-                <a:spcPts val="1000"/>
-              </a:spcAft>
-              <a:buSzPct val="100000"/>
-              <a:buChar char="•"/>
-              <a:lnSpc>
-                <a:spcPts val="2200"/>
-              </a:lnSpc>
-            </a:pPr>
-            <a:r>
-              <a:rPr sz="2000" b="0">
-                <a:solidFill>
-                  <a:srgbClr val="333333"/>
-                </a:solidFill>
-                <a:latin typeface="Calibri"/>
-              </a:rPr>
-              <a:t>In the implement track, open this module’s examples and the course `common/` solvers</a:t>
-            </a:r>
-          </a:p>
-          <a:p>
-            <a:pPr lvl="0" marL="457200" indent="-228600">
-              <a:buFont typeface="Calibri"/>
-              <a:spcAft>
-                <a:spcPts val="1000"/>
-              </a:spcAft>
-              <a:buSzPct val="100000"/>
-              <a:buChar char="•"/>
-              <a:lnSpc>
-                <a:spcPts val="2200"/>
-              </a:lnSpc>
-            </a:pPr>
-            <a:r>
-              <a:rPr sz="2000" b="0">
-                <a:solidFill>
-                  <a:srgbClr val="333333"/>
-                </a:solidFill>
-                <a:latin typeface="Calibri"/>
-              </a:rPr>
-              <a:t>Parse `tiny_place.json`, run the algorithm with a deterministic seed</a:t>
-            </a:r>
-          </a:p>
-          <a:p>
-            <a:pPr lvl="0" marL="457200" indent="-228600">
-              <a:buFont typeface="Calibri"/>
-              <a:spcAft>
-                <a:spcPts val="1000"/>
-              </a:spcAft>
-              <a:buSzPct val="100000"/>
-              <a:buChar char="•"/>
-              <a:lnSpc>
-                <a:spcPts val="2200"/>
-              </a:lnSpc>
-            </a:pPr>
-            <a:r>
-              <a:rPr sz="2000" b="0">
-                <a:solidFill>
-                  <a:srgbClr val="333333"/>
-                </a:solidFill>
-                <a:latin typeface="Calibri"/>
-              </a:rPr>
-              <a:t>Match the browser goldens before you claim the checklist</a:t>
-            </a:r>
-          </a:p>
-        </p:txBody>
-      </p:sp>
-      <p:sp>
-        <p:nvSpPr>
-          <p:cNvPr id="4" name="TextBox 3"/>
           <p:cNvSpPr txBox="1"/>
           <p:nvPr/>
         </p:nvSpPr>
